--- a/dist/초3/국어/읽기와어휘/초3_국어_읽기와어휘_03_국어사전찾기.pptx
+++ b/dist/초3/국어/읽기와어휘/초3_국어_읽기와어휘_03_국어사전찾기.pptx
@@ -119,13 +119,13 @@
   <p:extLst>
     <p:ext uri="{521415D9-36F7-43E2-AB2F-B90AF26B5E84}">
       <p14:sectionLst xmlns:p14="http://schemas.microsoft.com/office/powerpoint/2010/main">
-        <p14:section name="도입" id="{3e44be2f-fd96-037d-eb94-6ac6f54ef72a}">
+        <p14:section name="도입" id="{7bfbba80-5fa9-c435-7642-05f6bbbee6df}">
           <p14:sldIdLst>
             <p14:sldId id="256"/>
             <p14:sldId id="257"/>
           </p14:sldIdLst>
         </p14:section>
-        <p14:section name="개념" id="{3784ceff-6ade-2cbe-1718-3bedc7738c45}">
+        <p14:section name="개념" id="{6dc669c4-1e95-7ddd-2444-d52c62ea6c17}">
           <p14:sldIdLst>
             <p14:sldId id="258"/>
             <p14:sldId id="259"/>
@@ -133,31 +133,31 @@
             <p14:sldId id="262"/>
           </p14:sldIdLst>
         </p14:section>
-        <p14:section name="연습" id="{6026ae72-bd8d-5fe8-2862-d2cd59425204}">
+        <p14:section name="연습" id="{ec7f4a87-ab86-d9da-b7ad-affa7fb539a5}">
           <p14:sldIdLst>
             <p14:sldId id="260"/>
             <p14:sldId id="263"/>
           </p14:sldIdLst>
         </p14:section>
-        <p14:section name="개념" id="{21de635c-f32c-bdcb-e1de-1d5c09d7eb1a}">
+        <p14:section name="개념" id="{d711e9d7-8562-f46f-baf3-0fcdf5d68bbb}">
           <p14:sldIdLst/>
         </p14:section>
-        <p14:section name="연습" id="{dc1c4d1f-2a07-eb61-526e-70c777010c9a}">
+        <p14:section name="연습" id="{75be6427-6a92-7769-68d9-3b84004b50f1}">
           <p14:sldIdLst/>
         </p14:section>
-        <p14:section name="확인" id="{6d7a914d-64cc-dc85-6a0d-92f6eda2009d}">
+        <p14:section name="확인" id="{ec0a3cc7-230a-d40b-3339-6aecf453e0cc}">
           <p14:sldIdLst>
             <p14:sldId id="264"/>
             <p14:sldId id="265"/>
             <p14:sldId id="266"/>
           </p14:sldIdLst>
         </p14:section>
-        <p14:section name="정리" id="{e7c699ea-86d8-a26e-6441-b0bc5d68e5c7}">
+        <p14:section name="정리" id="{9054628c-7f17-8253-e819-866086c830d8}">
           <p14:sldIdLst>
             <p14:sldId id="267"/>
           </p14:sldIdLst>
         </p14:section>
-        <p14:section name="보충" id="{4de4e53e-b20a-2bc7-d3c8-a3d8a5d0a8cc}">
+        <p14:section name="보충" id="{86647e8a-e6c3-7de5-67ac-7fec5ad8e30c}">
           <p14:sldIdLst>
             <p14:sldId id="268"/>
           </p14:sldIdLst>
@@ -2860,7 +2860,7 @@
           <a:bodyPr wrap="square" lIns="0" tIns="0" rIns="0" bIns="0" rtlCol="0" anchor="ctr"/>
           <a:lstStyle/>
           <a:p>
-            <a:pPr algn="l" indent="0" marL="0">
+            <a:pPr eaLnBrk="0" algn="l" indent="0" marL="0">
               <a:buNone/>
             </a:pPr>
             <a:r>
@@ -2901,7 +2901,7 @@
           <a:bodyPr wrap="square" lIns="0" tIns="0" rIns="0" bIns="0" rtlCol="0" anchor="t"/>
           <a:lstStyle/>
           <a:p>
-            <a:pPr indent="0" marL="0">
+            <a:pPr eaLnBrk="0" indent="0" marL="0">
               <a:buNone/>
             </a:pPr>
             <a:r>
@@ -2967,7 +2967,7 @@
           <a:bodyPr wrap="square" lIns="0" tIns="0" rIns="0" bIns="0" rtlCol="0" anchor="ctr"/>
           <a:lstStyle/>
           <a:p>
-            <a:pPr indent="0" marL="0">
+            <a:pPr eaLnBrk="0" indent="0" marL="0">
               <a:spcAft>
                 <a:spcPts val="600"/>
               </a:spcAft>
@@ -2987,7 +2987,7 @@
             <a:endParaRPr lang="ko-KR" sz="3000" dirty="0"/>
           </a:p>
           <a:p>
-            <a:pPr indent="0" marL="0">
+            <a:pPr eaLnBrk="0" indent="0" marL="0">
               <a:spcAft>
                 <a:spcPts val="600"/>
               </a:spcAft>
@@ -3007,7 +3007,7 @@
             <a:endParaRPr lang="ko-KR" sz="3000" dirty="0"/>
           </a:p>
           <a:p>
-            <a:pPr indent="0" marL="0">
+            <a:pPr eaLnBrk="0" indent="0" marL="0">
               <a:spcAft>
                 <a:spcPts val="600"/>
               </a:spcAft>
@@ -3076,7 +3076,7 @@
           <a:bodyPr wrap="square" lIns="0" tIns="0" rIns="0" bIns="0" rtlCol="0" anchor="ctr"/>
           <a:lstStyle/>
           <a:p>
-            <a:pPr algn="l" indent="0" marL="0">
+            <a:pPr eaLnBrk="0" algn="l" indent="0" marL="0">
               <a:buNone/>
             </a:pPr>
             <a:r>
@@ -3142,7 +3142,7 @@
           <a:bodyPr wrap="square" lIns="0" tIns="0" rIns="0" bIns="0" rtlCol="0" anchor="ctr"/>
           <a:lstStyle/>
           <a:p>
-            <a:pPr indent="0" marL="0">
+            <a:pPr eaLnBrk="0" indent="0" marL="0">
               <a:spcAft>
                 <a:spcPts val="600"/>
               </a:spcAft>
@@ -3192,7 +3192,7 @@
           <a:bodyPr wrap="square" lIns="177800" tIns="0" rIns="177800" bIns="0" rtlCol="0" anchor="ctr"/>
           <a:lstStyle/>
           <a:p>
-            <a:pPr algn="l" indent="0" marL="0">
+            <a:pPr eaLnBrk="0" algn="l" indent="0" marL="0">
               <a:buNone/>
             </a:pPr>
             <a:r>
@@ -3231,7 +3231,7 @@
           <a:bodyPr wrap="square" lIns="0" tIns="0" rIns="0" bIns="0" rtlCol="0" anchor="ctr"/>
           <a:lstStyle/>
           <a:p>
-            <a:pPr algn="l" indent="0" marL="0">
+            <a:pPr eaLnBrk="0" algn="l" indent="0" marL="0">
               <a:buNone/>
             </a:pPr>
             <a:r>
@@ -3270,7 +3270,7 @@
           <a:bodyPr wrap="square" lIns="0" tIns="0" rIns="0" bIns="0" rtlCol="0" anchor="ctr"/>
           <a:lstStyle/>
           <a:p>
-            <a:pPr algn="l" indent="0" marL="0">
+            <a:pPr eaLnBrk="0" algn="l" indent="0" marL="0">
               <a:buNone/>
             </a:pPr>
             <a:r>
@@ -3309,7 +3309,7 @@
           <a:bodyPr wrap="square" lIns="0" tIns="0" rIns="0" bIns="0" rtlCol="0" anchor="ctr"/>
           <a:lstStyle/>
           <a:p>
-            <a:pPr algn="l" indent="0" marL="0">
+            <a:pPr eaLnBrk="0" algn="l" indent="0" marL="0">
               <a:buNone/>
             </a:pPr>
             <a:r>
@@ -3348,7 +3348,7 @@
           <a:bodyPr wrap="square" lIns="0" tIns="0" rIns="0" bIns="0" rtlCol="0" anchor="ctr"/>
           <a:lstStyle/>
           <a:p>
-            <a:pPr algn="l" indent="0" marL="0">
+            <a:pPr eaLnBrk="0" algn="l" indent="0" marL="0">
               <a:buNone/>
             </a:pPr>
             <a:r>
@@ -3395,7 +3395,7 @@
           <a:bodyPr wrap="square" lIns="177800" tIns="0" rIns="177800" bIns="0" rtlCol="0" anchor="ctr"/>
           <a:lstStyle/>
           <a:p>
-            <a:pPr algn="l" indent="0" marL="0">
+            <a:pPr eaLnBrk="0" algn="l" indent="0" marL="0">
               <a:buNone/>
             </a:pPr>
             <a:r>
@@ -3434,7 +3434,7 @@
           <a:bodyPr wrap="square" lIns="0" tIns="0" rIns="0" bIns="0" rtlCol="0" anchor="ctr"/>
           <a:lstStyle/>
           <a:p>
-            <a:pPr algn="l" indent="0" marL="0">
+            <a:pPr eaLnBrk="0" algn="l" indent="0" marL="0">
               <a:buNone/>
             </a:pPr>
             <a:r>
@@ -3473,7 +3473,7 @@
           <a:bodyPr wrap="square" lIns="0" tIns="0" rIns="0" bIns="0" rtlCol="0" anchor="ctr"/>
           <a:lstStyle/>
           <a:p>
-            <a:pPr algn="l" indent="0" marL="0">
+            <a:pPr eaLnBrk="0" algn="l" indent="0" marL="0">
               <a:buNone/>
             </a:pPr>
             <a:r>
@@ -3512,7 +3512,7 @@
           <a:bodyPr wrap="square" lIns="0" tIns="0" rIns="0" bIns="0" rtlCol="0" anchor="ctr"/>
           <a:lstStyle/>
           <a:p>
-            <a:pPr algn="l" indent="0" marL="0">
+            <a:pPr eaLnBrk="0" algn="l" indent="0" marL="0">
               <a:buNone/>
             </a:pPr>
             <a:r>
@@ -3551,7 +3551,7 @@
           <a:bodyPr wrap="square" lIns="0" tIns="0" rIns="0" bIns="0" rtlCol="0" anchor="ctr"/>
           <a:lstStyle/>
           <a:p>
-            <a:pPr algn="l" indent="0" marL="0">
+            <a:pPr eaLnBrk="0" algn="l" indent="0" marL="0">
               <a:buNone/>
             </a:pPr>
             <a:r>
@@ -3608,7 +3608,7 @@
             </a:lvl1pPr>
           </a:lstStyle>
           <a:p>
-            <a:pPr algn="r"/>
+            <a:pPr eaLnBrk="0" algn="r"/>
             <a:fld id="{F7021451-1387-4CA6-816F-3879F97B5CBC}" type="slidenum">
               <a:rPr b="0" lang="en-US"/>
               <a:t>10</a:t>
@@ -3665,7 +3665,7 @@
           <a:bodyPr wrap="square" lIns="0" tIns="0" rIns="0" bIns="0" rtlCol="0" anchor="ctr"/>
           <a:lstStyle/>
           <a:p>
-            <a:pPr algn="l" indent="0" marL="0">
+            <a:pPr eaLnBrk="0" algn="l" indent="0" marL="0">
               <a:buNone/>
             </a:pPr>
             <a:r>
@@ -3731,7 +3731,7 @@
           <a:bodyPr wrap="square" lIns="0" tIns="0" rIns="0" bIns="0" rtlCol="0" anchor="ctr"/>
           <a:lstStyle/>
           <a:p>
-            <a:pPr indent="0" marL="0">
+            <a:pPr eaLnBrk="0" indent="0" marL="0">
               <a:spcAft>
                 <a:spcPts val="600"/>
               </a:spcAft>
@@ -3781,7 +3781,7 @@
           <a:bodyPr wrap="square" lIns="0" tIns="0" rIns="0" bIns="0" rtlCol="0" anchor="ctr"/>
           <a:lstStyle/>
           <a:p>
-            <a:pPr algn="ctr" indent="0" marL="0">
+            <a:pPr eaLnBrk="0" algn="ctr" indent="0" marL="0">
               <a:buNone/>
             </a:pPr>
             <a:r>
@@ -3847,7 +3847,7 @@
           <a:bodyPr wrap="square" lIns="0" tIns="0" rIns="0" bIns="0" rtlCol="0" anchor="ctr"/>
           <a:lstStyle/>
           <a:p>
-            <a:pPr indent="0" marL="0">
+            <a:pPr eaLnBrk="0" indent="0" marL="0">
               <a:spcAft>
                 <a:spcPts val="600"/>
               </a:spcAft>
@@ -3897,7 +3897,7 @@
           <a:bodyPr wrap="square" lIns="0" tIns="0" rIns="0" bIns="0" rtlCol="0" anchor="ctr"/>
           <a:lstStyle/>
           <a:p>
-            <a:pPr algn="ctr" indent="0" marL="0">
+            <a:pPr eaLnBrk="0" algn="ctr" indent="0" marL="0">
               <a:buNone/>
             </a:pPr>
             <a:r>
@@ -3963,7 +3963,7 @@
           <a:bodyPr wrap="square" lIns="0" tIns="0" rIns="0" bIns="0" rtlCol="0" anchor="ctr"/>
           <a:lstStyle/>
           <a:p>
-            <a:pPr indent="0" marL="0">
+            <a:pPr eaLnBrk="0" indent="0" marL="0">
               <a:spcAft>
                 <a:spcPts val="600"/>
               </a:spcAft>
@@ -4013,7 +4013,7 @@
           <a:bodyPr wrap="square" lIns="0" tIns="0" rIns="0" bIns="0" rtlCol="0" anchor="ctr"/>
           <a:lstStyle/>
           <a:p>
-            <a:pPr algn="ctr" indent="0" marL="0">
+            <a:pPr eaLnBrk="0" algn="ctr" indent="0" marL="0">
               <a:buNone/>
             </a:pPr>
             <a:r>
@@ -4079,7 +4079,7 @@
           <a:bodyPr wrap="square" lIns="0" tIns="0" rIns="0" bIns="0" rtlCol="0" anchor="ctr"/>
           <a:lstStyle/>
           <a:p>
-            <a:pPr indent="0" marL="0">
+            <a:pPr eaLnBrk="0" indent="0" marL="0">
               <a:spcAft>
                 <a:spcPts val="600"/>
               </a:spcAft>
@@ -4139,7 +4139,7 @@
             </a:lvl1pPr>
           </a:lstStyle>
           <a:p>
-            <a:pPr algn="r"/>
+            <a:pPr eaLnBrk="0" algn="r"/>
             <a:fld id="{F7021451-1387-4CA6-816F-3879F97B5CBC}" type="slidenum">
               <a:rPr b="0" lang="en-US"/>
               <a:t>11</a:t>
@@ -4196,7 +4196,7 @@
           <a:bodyPr wrap="square" lIns="0" tIns="0" rIns="0" bIns="0" rtlCol="0" anchor="ctr"/>
           <a:lstStyle/>
           <a:p>
-            <a:pPr algn="l" indent="0" marL="0">
+            <a:pPr eaLnBrk="0" algn="l" indent="0" marL="0">
               <a:buNone/>
             </a:pPr>
             <a:r>
@@ -4262,7 +4262,7 @@
           <a:bodyPr wrap="square" lIns="0" tIns="0" rIns="0" bIns="0" rtlCol="0" anchor="ctr"/>
           <a:lstStyle/>
           <a:p>
-            <a:pPr indent="0" marL="0">
+            <a:pPr eaLnBrk="0" indent="0" marL="0">
               <a:spcAft>
                 <a:spcPts val="600"/>
               </a:spcAft>
@@ -4282,7 +4282,7 @@
             <a:endParaRPr lang="ko-KR" sz="3000" dirty="0"/>
           </a:p>
           <a:p>
-            <a:pPr indent="0" marL="0">
+            <a:pPr eaLnBrk="0" indent="0" marL="0">
               <a:spcAft>
                 <a:spcPts val="600"/>
               </a:spcAft>
@@ -4332,7 +4332,7 @@
           <a:bodyPr wrap="square" lIns="177800" tIns="0" rIns="177800" bIns="0" rtlCol="0" anchor="ctr"/>
           <a:lstStyle/>
           <a:p>
-            <a:pPr algn="l" indent="0" marL="0">
+            <a:pPr eaLnBrk="0" algn="l" indent="0" marL="0">
               <a:buNone/>
             </a:pPr>
             <a:r>
@@ -4379,7 +4379,7 @@
           <a:bodyPr wrap="square" lIns="177800" tIns="0" rIns="177800" bIns="0" rtlCol="0" anchor="ctr"/>
           <a:lstStyle/>
           <a:p>
-            <a:pPr algn="l" indent="0" marL="0">
+            <a:pPr eaLnBrk="0" algn="l" indent="0" marL="0">
               <a:buNone/>
             </a:pPr>
             <a:r>
@@ -4418,7 +4418,7 @@
           <a:bodyPr wrap="square" lIns="0" tIns="0" rIns="0" bIns="0" rtlCol="0" anchor="t"/>
           <a:lstStyle/>
           <a:p>
-            <a:pPr algn="l" indent="0" marL="0">
+            <a:pPr eaLnBrk="0" algn="l" indent="0" marL="0">
               <a:buNone/>
             </a:pPr>
             <a:r>
@@ -4457,7 +4457,7 @@
           <a:bodyPr wrap="square" lIns="0" tIns="0" rIns="0" bIns="0" rtlCol="0" anchor="ctr"/>
           <a:lstStyle/>
           <a:p>
-            <a:pPr algn="l" indent="0" marL="0">
+            <a:pPr eaLnBrk="0" algn="l" indent="0" marL="0">
               <a:buNone/>
             </a:pPr>
             <a:r>
@@ -4496,7 +4496,7 @@
           <a:bodyPr wrap="square" lIns="0" tIns="0" rIns="0" bIns="0" rtlCol="0" anchor="ctr"/>
           <a:lstStyle/>
           <a:p>
-            <a:pPr algn="l" indent="0" marL="0">
+            <a:pPr eaLnBrk="0" algn="l" indent="0" marL="0">
               <a:buNone/>
             </a:pPr>
             <a:r>
@@ -4535,7 +4535,7 @@
           <a:bodyPr wrap="square" lIns="0" tIns="0" rIns="0" bIns="0" rtlCol="0" anchor="ctr"/>
           <a:lstStyle/>
           <a:p>
-            <a:pPr algn="l" indent="0" marL="0">
+            <a:pPr eaLnBrk="0" algn="l" indent="0" marL="0">
               <a:buNone/>
             </a:pPr>
             <a:r>
@@ -4574,7 +4574,7 @@
           <a:bodyPr wrap="square" lIns="0" tIns="0" rIns="0" bIns="0" rtlCol="0" anchor="ctr"/>
           <a:lstStyle/>
           <a:p>
-            <a:pPr algn="l" indent="0" marL="0">
+            <a:pPr eaLnBrk="0" algn="l" indent="0" marL="0">
               <a:buNone/>
             </a:pPr>
             <a:r>
@@ -4631,7 +4631,7 @@
             </a:lvl1pPr>
           </a:lstStyle>
           <a:p>
-            <a:pPr algn="r"/>
+            <a:pPr eaLnBrk="0" algn="r"/>
             <a:fld id="{F7021451-1387-4CA6-816F-3879F97B5CBC}" type="slidenum">
               <a:rPr b="0" lang="en-US"/>
               <a:t>12</a:t>
@@ -4688,7 +4688,7 @@
           <a:bodyPr wrap="square" lIns="0" tIns="0" rIns="0" bIns="0" rtlCol="0" anchor="ctr"/>
           <a:lstStyle/>
           <a:p>
-            <a:pPr algn="l" indent="0" marL="0">
+            <a:pPr eaLnBrk="0" algn="l" indent="0" marL="0">
               <a:buNone/>
             </a:pPr>
             <a:r>
@@ -4727,7 +4727,7 @@
           <a:bodyPr wrap="square" lIns="0" tIns="0" rIns="0" bIns="0" rtlCol="0" anchor="ctr"/>
           <a:lstStyle/>
           <a:p>
-            <a:pPr algn="l" indent="0" marL="0">
+            <a:pPr eaLnBrk="0" algn="l" indent="0" marL="0">
               <a:buNone/>
             </a:pPr>
             <a:r>
@@ -4793,7 +4793,7 @@
           <a:bodyPr wrap="square" lIns="0" tIns="0" rIns="0" bIns="0" rtlCol="0" anchor="ctr"/>
           <a:lstStyle/>
           <a:p>
-            <a:pPr indent="0" marL="0">
+            <a:pPr eaLnBrk="0" indent="0" marL="0">
               <a:spcAft>
                 <a:spcPts val="600"/>
               </a:spcAft>
@@ -4843,7 +4843,7 @@
           <a:bodyPr wrap="square" lIns="0" tIns="0" rIns="0" bIns="0" rtlCol="0" anchor="ctr"/>
           <a:lstStyle/>
           <a:p>
-            <a:pPr algn="ctr" indent="0" marL="0">
+            <a:pPr eaLnBrk="0" algn="ctr" indent="0" marL="0">
               <a:buNone/>
             </a:pPr>
             <a:r>
@@ -4882,7 +4882,7 @@
           <a:bodyPr wrap="square" lIns="0" tIns="0" rIns="0" bIns="0" rtlCol="0" anchor="ctr"/>
           <a:lstStyle/>
           <a:p>
-            <a:pPr algn="ctr" indent="0" marL="0">
+            <a:pPr eaLnBrk="0" algn="ctr" indent="0" marL="0">
               <a:buNone/>
             </a:pPr>
             <a:r>
@@ -4929,7 +4929,7 @@
           <a:bodyPr wrap="square" lIns="0" tIns="0" rIns="0" bIns="0" rtlCol="0" anchor="ctr"/>
           <a:lstStyle/>
           <a:p>
-            <a:pPr algn="ctr" indent="0" marL="0">
+            <a:pPr eaLnBrk="0" algn="ctr" indent="0" marL="0">
               <a:buNone/>
             </a:pPr>
             <a:r>
@@ -4968,7 +4968,7 @@
           <a:bodyPr wrap="square" lIns="0" tIns="0" rIns="0" bIns="0" rtlCol="0" anchor="ctr"/>
           <a:lstStyle/>
           <a:p>
-            <a:pPr algn="ctr" indent="0" marL="0">
+            <a:pPr eaLnBrk="0" algn="ctr" indent="0" marL="0">
               <a:buNone/>
             </a:pPr>
             <a:r>
@@ -5015,7 +5015,7 @@
           <a:bodyPr wrap="square" lIns="0" tIns="0" rIns="0" bIns="0" rtlCol="0" anchor="ctr"/>
           <a:lstStyle/>
           <a:p>
-            <a:pPr algn="ctr" indent="0" marL="0">
+            <a:pPr eaLnBrk="0" algn="ctr" indent="0" marL="0">
               <a:buNone/>
             </a:pPr>
             <a:r>
@@ -5054,7 +5054,7 @@
           <a:bodyPr wrap="square" lIns="0" tIns="0" rIns="0" bIns="0" rtlCol="0" anchor="ctr"/>
           <a:lstStyle/>
           <a:p>
-            <a:pPr algn="ctr" indent="0" marL="0">
+            <a:pPr eaLnBrk="0" algn="ctr" indent="0" marL="0">
               <a:buNone/>
             </a:pPr>
             <a:r>
@@ -5101,7 +5101,7 @@
           <a:bodyPr wrap="square" lIns="0" tIns="0" rIns="0" bIns="0" rtlCol="0" anchor="ctr"/>
           <a:lstStyle/>
           <a:p>
-            <a:pPr algn="ctr" indent="0" marL="0">
+            <a:pPr eaLnBrk="0" algn="ctr" indent="0" marL="0">
               <a:buNone/>
             </a:pPr>
             <a:r>
@@ -5140,7 +5140,7 @@
           <a:bodyPr wrap="square" lIns="0" tIns="0" rIns="0" bIns="0" rtlCol="0" anchor="ctr"/>
           <a:lstStyle/>
           <a:p>
-            <a:pPr algn="ctr" indent="0" marL="0">
+            <a:pPr eaLnBrk="0" algn="ctr" indent="0" marL="0">
               <a:buNone/>
             </a:pPr>
             <a:r>
@@ -5187,7 +5187,7 @@
           <a:bodyPr wrap="square" lIns="0" tIns="0" rIns="0" bIns="0" rtlCol="0" anchor="ctr"/>
           <a:lstStyle/>
           <a:p>
-            <a:pPr algn="ctr" indent="0" marL="0">
+            <a:pPr eaLnBrk="0" algn="ctr" indent="0" marL="0">
               <a:buNone/>
             </a:pPr>
             <a:r>
@@ -5226,7 +5226,7 @@
           <a:bodyPr wrap="square" lIns="0" tIns="0" rIns="0" bIns="0" rtlCol="0" anchor="ctr"/>
           <a:lstStyle/>
           <a:p>
-            <a:pPr algn="ctr" indent="0" marL="0">
+            <a:pPr eaLnBrk="0" algn="ctr" indent="0" marL="0">
               <a:buNone/>
             </a:pPr>
             <a:r>
@@ -5273,7 +5273,7 @@
           <a:bodyPr wrap="square" lIns="0" tIns="0" rIns="0" bIns="0" rtlCol="0" anchor="ctr"/>
           <a:lstStyle/>
           <a:p>
-            <a:pPr algn="ctr" indent="0" marL="0">
+            <a:pPr eaLnBrk="0" algn="ctr" indent="0" marL="0">
               <a:buNone/>
             </a:pPr>
             <a:r>
@@ -5312,7 +5312,7 @@
           <a:bodyPr wrap="square" lIns="0" tIns="0" rIns="0" bIns="0" rtlCol="0" anchor="ctr"/>
           <a:lstStyle/>
           <a:p>
-            <a:pPr algn="ctr" indent="0" marL="0">
+            <a:pPr eaLnBrk="0" algn="ctr" indent="0" marL="0">
               <a:buNone/>
             </a:pPr>
             <a:r>
@@ -5359,7 +5359,7 @@
           <a:bodyPr wrap="square" lIns="0" tIns="0" rIns="0" bIns="0" rtlCol="0" anchor="ctr"/>
           <a:lstStyle/>
           <a:p>
-            <a:pPr algn="ctr" indent="0" marL="0">
+            <a:pPr eaLnBrk="0" algn="ctr" indent="0" marL="0">
               <a:buNone/>
             </a:pPr>
             <a:r>
@@ -5398,7 +5398,7 @@
           <a:bodyPr wrap="square" lIns="0" tIns="0" rIns="0" bIns="0" rtlCol="0" anchor="ctr"/>
           <a:lstStyle/>
           <a:p>
-            <a:pPr algn="ctr" indent="0" marL="0">
+            <a:pPr eaLnBrk="0" algn="ctr" indent="0" marL="0">
               <a:buNone/>
             </a:pPr>
             <a:r>
@@ -5445,7 +5445,7 @@
           <a:bodyPr wrap="square" lIns="0" tIns="0" rIns="0" bIns="0" rtlCol="0" anchor="ctr"/>
           <a:lstStyle/>
           <a:p>
-            <a:pPr algn="ctr" indent="0" marL="0">
+            <a:pPr eaLnBrk="0" algn="ctr" indent="0" marL="0">
               <a:buNone/>
             </a:pPr>
             <a:r>
@@ -5484,7 +5484,7 @@
           <a:bodyPr wrap="square" lIns="0" tIns="0" rIns="0" bIns="0" rtlCol="0" anchor="ctr"/>
           <a:lstStyle/>
           <a:p>
-            <a:pPr algn="ctr" indent="0" marL="0">
+            <a:pPr eaLnBrk="0" algn="ctr" indent="0" marL="0">
               <a:buNone/>
             </a:pPr>
             <a:r>
@@ -5531,7 +5531,7 @@
           <a:bodyPr wrap="square" lIns="0" tIns="0" rIns="0" bIns="0" rtlCol="0" anchor="ctr"/>
           <a:lstStyle/>
           <a:p>
-            <a:pPr algn="ctr" indent="0" marL="0">
+            <a:pPr eaLnBrk="0" algn="ctr" indent="0" marL="0">
               <a:buNone/>
             </a:pPr>
             <a:r>
@@ -5570,7 +5570,7 @@
           <a:bodyPr wrap="square" lIns="0" tIns="0" rIns="0" bIns="0" rtlCol="0" anchor="ctr"/>
           <a:lstStyle/>
           <a:p>
-            <a:pPr algn="ctr" indent="0" marL="0">
+            <a:pPr eaLnBrk="0" algn="ctr" indent="0" marL="0">
               <a:buNone/>
             </a:pPr>
             <a:r>
@@ -5617,7 +5617,7 @@
           <a:bodyPr wrap="square" lIns="0" tIns="0" rIns="0" bIns="0" rtlCol="0" anchor="ctr"/>
           <a:lstStyle/>
           <a:p>
-            <a:pPr algn="ctr" indent="0" marL="0">
+            <a:pPr eaLnBrk="0" algn="ctr" indent="0" marL="0">
               <a:buNone/>
             </a:pPr>
             <a:r>
@@ -5656,7 +5656,7 @@
           <a:bodyPr wrap="square" lIns="0" tIns="0" rIns="0" bIns="0" rtlCol="0" anchor="ctr"/>
           <a:lstStyle/>
           <a:p>
-            <a:pPr algn="ctr" indent="0" marL="0">
+            <a:pPr eaLnBrk="0" algn="ctr" indent="0" marL="0">
               <a:buNone/>
             </a:pPr>
             <a:r>
@@ -5703,7 +5703,7 @@
           <a:bodyPr wrap="square" lIns="0" tIns="0" rIns="0" bIns="0" rtlCol="0" anchor="ctr"/>
           <a:lstStyle/>
           <a:p>
-            <a:pPr algn="ctr" indent="0" marL="0">
+            <a:pPr eaLnBrk="0" algn="ctr" indent="0" marL="0">
               <a:buNone/>
             </a:pPr>
             <a:r>
@@ -5742,7 +5742,7 @@
           <a:bodyPr wrap="square" lIns="0" tIns="0" rIns="0" bIns="0" rtlCol="0" anchor="ctr"/>
           <a:lstStyle/>
           <a:p>
-            <a:pPr algn="ctr" indent="0" marL="0">
+            <a:pPr eaLnBrk="0" algn="ctr" indent="0" marL="0">
               <a:buNone/>
             </a:pPr>
             <a:r>
@@ -5789,7 +5789,7 @@
           <a:bodyPr wrap="square" lIns="0" tIns="0" rIns="0" bIns="0" rtlCol="0" anchor="ctr"/>
           <a:lstStyle/>
           <a:p>
-            <a:pPr algn="ctr" indent="0" marL="0">
+            <a:pPr eaLnBrk="0" algn="ctr" indent="0" marL="0">
               <a:buNone/>
             </a:pPr>
             <a:r>
@@ -5828,7 +5828,7 @@
           <a:bodyPr wrap="square" lIns="0" tIns="0" rIns="0" bIns="0" rtlCol="0" anchor="ctr"/>
           <a:lstStyle/>
           <a:p>
-            <a:pPr algn="ctr" indent="0" marL="0">
+            <a:pPr eaLnBrk="0" algn="ctr" indent="0" marL="0">
               <a:buNone/>
             </a:pPr>
             <a:r>
@@ -5875,7 +5875,7 @@
           <a:bodyPr wrap="square" lIns="0" tIns="0" rIns="0" bIns="0" rtlCol="0" anchor="ctr"/>
           <a:lstStyle/>
           <a:p>
-            <a:pPr algn="ctr" indent="0" marL="0">
+            <a:pPr eaLnBrk="0" algn="ctr" indent="0" marL="0">
               <a:buNone/>
             </a:pPr>
             <a:r>
@@ -5914,7 +5914,7 @@
           <a:bodyPr wrap="square" lIns="0" tIns="0" rIns="0" bIns="0" rtlCol="0" anchor="ctr"/>
           <a:lstStyle/>
           <a:p>
-            <a:pPr algn="ctr" indent="0" marL="0">
+            <a:pPr eaLnBrk="0" algn="ctr" indent="0" marL="0">
               <a:buNone/>
             </a:pPr>
             <a:r>
@@ -5961,7 +5961,7 @@
           <a:bodyPr wrap="square" lIns="0" tIns="0" rIns="0" bIns="0" rtlCol="0" anchor="ctr"/>
           <a:lstStyle/>
           <a:p>
-            <a:pPr algn="ctr" indent="0" marL="0">
+            <a:pPr eaLnBrk="0" algn="ctr" indent="0" marL="0">
               <a:buNone/>
             </a:pPr>
             <a:r>
@@ -6000,7 +6000,7 @@
           <a:bodyPr wrap="square" lIns="0" tIns="0" rIns="0" bIns="0" rtlCol="0" anchor="ctr"/>
           <a:lstStyle/>
           <a:p>
-            <a:pPr algn="ctr" indent="0" marL="0">
+            <a:pPr eaLnBrk="0" algn="ctr" indent="0" marL="0">
               <a:buNone/>
             </a:pPr>
             <a:r>
@@ -6057,7 +6057,7 @@
             </a:lvl1pPr>
           </a:lstStyle>
           <a:p>
-            <a:pPr algn="r"/>
+            <a:pPr eaLnBrk="0" algn="r"/>
             <a:fld id="{F7021451-1387-4CA6-816F-3879F97B5CBC}" type="slidenum">
               <a:rPr b="0" lang="en-US"/>
               <a:t>13</a:t>
@@ -6114,7 +6114,7 @@
           <a:bodyPr wrap="square" lIns="0" tIns="0" rIns="0" bIns="0" rtlCol="0" anchor="ctr"/>
           <a:lstStyle/>
           <a:p>
-            <a:pPr algn="l" indent="0" marL="0">
+            <a:pPr eaLnBrk="0" algn="l" indent="0" marL="0">
               <a:buNone/>
             </a:pPr>
             <a:r>
@@ -6161,7 +6161,7 @@
           <a:bodyPr wrap="square" lIns="0" tIns="0" rIns="0" bIns="0" rtlCol="0" anchor="ctr"/>
           <a:lstStyle/>
           <a:p>
-            <a:pPr algn="ctr" indent="0" marL="0">
+            <a:pPr eaLnBrk="0" algn="ctr" indent="0" marL="0">
               <a:buNone/>
             </a:pPr>
             <a:r>
@@ -6200,7 +6200,7 @@
           <a:bodyPr wrap="square" lIns="0" tIns="0" rIns="0" bIns="0" rtlCol="0" anchor="ctr"/>
           <a:lstStyle/>
           <a:p>
-            <a:pPr algn="l" indent="0" marL="0">
+            <a:pPr eaLnBrk="0" algn="l" indent="0" marL="0">
               <a:buNone/>
             </a:pPr>
             <a:r>
@@ -6247,7 +6247,7 @@
           <a:bodyPr wrap="square" lIns="0" tIns="0" rIns="0" bIns="0" rtlCol="0" anchor="ctr"/>
           <a:lstStyle/>
           <a:p>
-            <a:pPr algn="ctr" indent="0" marL="0">
+            <a:pPr eaLnBrk="0" algn="ctr" indent="0" marL="0">
               <a:buNone/>
             </a:pPr>
             <a:r>
@@ -6286,7 +6286,7 @@
           <a:bodyPr wrap="square" lIns="0" tIns="0" rIns="0" bIns="0" rtlCol="0" anchor="ctr"/>
           <a:lstStyle/>
           <a:p>
-            <a:pPr algn="l" indent="0" marL="0">
+            <a:pPr eaLnBrk="0" algn="l" indent="0" marL="0">
               <a:buNone/>
             </a:pPr>
             <a:r>
@@ -6343,7 +6343,7 @@
             </a:lvl1pPr>
           </a:lstStyle>
           <a:p>
-            <a:pPr algn="r"/>
+            <a:pPr eaLnBrk="0" algn="r"/>
             <a:fld id="{F7021451-1387-4CA6-816F-3879F97B5CBC}" type="slidenum">
               <a:rPr b="0" lang="en-US"/>
               <a:t>2</a:t>
@@ -6400,7 +6400,7 @@
           <a:bodyPr wrap="square" lIns="0" tIns="0" rIns="0" bIns="0" rtlCol="0" anchor="ctr"/>
           <a:lstStyle/>
           <a:p>
-            <a:pPr algn="l" indent="0" marL="0">
+            <a:pPr eaLnBrk="0" algn="l" indent="0" marL="0">
               <a:buNone/>
             </a:pPr>
             <a:r>
@@ -6439,7 +6439,7 @@
           <a:bodyPr wrap="square" lIns="0" tIns="0" rIns="0" bIns="0" rtlCol="0" anchor="ctr"/>
           <a:lstStyle/>
           <a:p>
-            <a:pPr algn="l" indent="0" marL="0">
+            <a:pPr eaLnBrk="0" algn="l" indent="0" marL="0">
               <a:buNone/>
             </a:pPr>
             <a:r>
@@ -6505,7 +6505,7 @@
           <a:bodyPr wrap="square" lIns="0" tIns="0" rIns="0" bIns="0" rtlCol="0" anchor="ctr"/>
           <a:lstStyle/>
           <a:p>
-            <a:pPr indent="0" marL="0">
+            <a:pPr eaLnBrk="0" indent="0" marL="0">
               <a:spcAft>
                 <a:spcPts val="600"/>
               </a:spcAft>
@@ -6525,7 +6525,7 @@
             <a:endParaRPr lang="ko-KR" sz="3000" dirty="0"/>
           </a:p>
           <a:p>
-            <a:pPr indent="0" marL="0">
+            <a:pPr eaLnBrk="0" indent="0" marL="0">
               <a:spcAft>
                 <a:spcPts val="600"/>
               </a:spcAft>
@@ -6594,7 +6594,7 @@
           <a:bodyPr wrap="square" lIns="0" tIns="0" rIns="0" bIns="0" rtlCol="0" anchor="ctr"/>
           <a:lstStyle/>
           <a:p>
-            <a:pPr indent="0" marL="0">
+            <a:pPr eaLnBrk="0" indent="0" marL="0">
               <a:spcAft>
                 <a:spcPts val="600"/>
               </a:spcAft>
@@ -6614,7 +6614,7 @@
             <a:endParaRPr lang="ko-KR" sz="3000" dirty="0"/>
           </a:p>
           <a:p>
-            <a:pPr indent="0" marL="0">
+            <a:pPr eaLnBrk="0" indent="0" marL="0">
               <a:spcAft>
                 <a:spcPts val="600"/>
               </a:spcAft>
@@ -6664,7 +6664,7 @@
           <a:bodyPr wrap="square" lIns="76200" tIns="50800" rIns="76200" bIns="50800" rtlCol="0" anchor="ctr"/>
           <a:lstStyle/>
           <a:p>
-            <a:pPr algn="ctr" indent="0" marL="0">
+            <a:pPr eaLnBrk="0" algn="ctr" indent="0" marL="0">
               <a:buNone/>
             </a:pPr>
             <a:r>
@@ -6711,7 +6711,7 @@
           <a:bodyPr wrap="square" lIns="76200" tIns="50800" rIns="76200" bIns="50800" rtlCol="0" anchor="ctr"/>
           <a:lstStyle/>
           <a:p>
-            <a:pPr algn="ctr" indent="0" marL="0">
+            <a:pPr eaLnBrk="0" algn="ctr" indent="0" marL="0">
               <a:buNone/>
             </a:pPr>
             <a:r>
@@ -6758,7 +6758,7 @@
           <a:bodyPr wrap="square" lIns="76200" tIns="50800" rIns="76200" bIns="50800" rtlCol="0" anchor="ctr"/>
           <a:lstStyle/>
           <a:p>
-            <a:pPr algn="ctr" indent="0" marL="0">
+            <a:pPr eaLnBrk="0" algn="ctr" indent="0" marL="0">
               <a:buNone/>
             </a:pPr>
             <a:r>
@@ -6805,7 +6805,7 @@
           <a:bodyPr wrap="square" lIns="76200" tIns="50800" rIns="76200" bIns="50800" rtlCol="0" anchor="ctr"/>
           <a:lstStyle/>
           <a:p>
-            <a:pPr algn="ctr" indent="0" marL="0">
+            <a:pPr eaLnBrk="0" algn="ctr" indent="0" marL="0">
               <a:buNone/>
             </a:pPr>
             <a:r>
@@ -6822,7 +6822,7 @@
             <a:endParaRPr lang="ko-KR" sz="3400" dirty="0"/>
           </a:p>
           <a:p>
-            <a:pPr algn="ctr" indent="0" marL="0">
+            <a:pPr eaLnBrk="0" algn="ctr" indent="0" marL="0">
               <a:buNone/>
             </a:pPr>
             <a:r>
@@ -6879,7 +6879,7 @@
             </a:lvl1pPr>
           </a:lstStyle>
           <a:p>
-            <a:pPr algn="r"/>
+            <a:pPr eaLnBrk="0" algn="r"/>
             <a:fld id="{F7021451-1387-4CA6-816F-3879F97B5CBC}" type="slidenum">
               <a:rPr b="0" lang="en-US"/>
               <a:t>3</a:t>
@@ -6936,7 +6936,7 @@
           <a:bodyPr wrap="square" lIns="0" tIns="0" rIns="0" bIns="0" rtlCol="0" anchor="ctr"/>
           <a:lstStyle/>
           <a:p>
-            <a:pPr algn="l" indent="0" marL="0">
+            <a:pPr eaLnBrk="0" algn="l" indent="0" marL="0">
               <a:buNone/>
             </a:pPr>
             <a:r>
@@ -6975,7 +6975,7 @@
           <a:bodyPr wrap="square" lIns="0" tIns="0" rIns="0" bIns="0" rtlCol="0" anchor="ctr"/>
           <a:lstStyle/>
           <a:p>
-            <a:pPr algn="l" indent="0" marL="0">
+            <a:pPr eaLnBrk="0" algn="l" indent="0" marL="0">
               <a:buNone/>
             </a:pPr>
             <a:r>
@@ -7020,7 +7020,7 @@
           <a:bodyPr wrap="square" lIns="0" tIns="0" rIns="0" bIns="0" rtlCol="0" anchor="ctr"/>
           <a:lstStyle/>
           <a:p>
-            <a:pPr algn="ctr" indent="0" marL="0">
+            <a:pPr eaLnBrk="0" algn="ctr" indent="0" marL="0">
               <a:buNone/>
             </a:pPr>
             <a:r>
@@ -7059,7 +7059,7 @@
           <a:bodyPr wrap="square" lIns="0" tIns="0" rIns="0" bIns="0" rtlCol="0" anchor="t"/>
           <a:lstStyle/>
           <a:p>
-            <a:pPr algn="l" indent="0" marL="0">
+            <a:pPr eaLnBrk="0" algn="l" indent="0" marL="0">
               <a:buNone/>
             </a:pPr>
             <a:r>
@@ -7104,7 +7104,7 @@
           <a:bodyPr wrap="square" lIns="0" tIns="0" rIns="0" bIns="0" rtlCol="0" anchor="ctr"/>
           <a:lstStyle/>
           <a:p>
-            <a:pPr algn="ctr" indent="0" marL="0">
+            <a:pPr eaLnBrk="0" algn="ctr" indent="0" marL="0">
               <a:buNone/>
             </a:pPr>
             <a:r>
@@ -7143,7 +7143,7 @@
           <a:bodyPr wrap="square" lIns="0" tIns="0" rIns="0" bIns="0" rtlCol="0" anchor="t"/>
           <a:lstStyle/>
           <a:p>
-            <a:pPr algn="l" indent="0" marL="0">
+            <a:pPr eaLnBrk="0" algn="l" indent="0" marL="0">
               <a:buNone/>
             </a:pPr>
             <a:r>
@@ -7188,7 +7188,7 @@
           <a:bodyPr wrap="square" lIns="0" tIns="0" rIns="0" bIns="0" rtlCol="0" anchor="ctr"/>
           <a:lstStyle/>
           <a:p>
-            <a:pPr algn="ctr" indent="0" marL="0">
+            <a:pPr eaLnBrk="0" algn="ctr" indent="0" marL="0">
               <a:buNone/>
             </a:pPr>
             <a:r>
@@ -7227,7 +7227,7 @@
           <a:bodyPr wrap="square" lIns="0" tIns="0" rIns="0" bIns="0" rtlCol="0" anchor="t"/>
           <a:lstStyle/>
           <a:p>
-            <a:pPr algn="l" indent="0" marL="0">
+            <a:pPr eaLnBrk="0" algn="l" indent="0" marL="0">
               <a:buNone/>
             </a:pPr>
             <a:r>
@@ -7284,7 +7284,7 @@
             </a:lvl1pPr>
           </a:lstStyle>
           <a:p>
-            <a:pPr algn="r"/>
+            <a:pPr eaLnBrk="0" algn="r"/>
             <a:fld id="{F7021451-1387-4CA6-816F-3879F97B5CBC}" type="slidenum">
               <a:rPr b="0" lang="en-US"/>
               <a:t>4</a:t>
@@ -7341,7 +7341,7 @@
           <a:bodyPr wrap="square" lIns="0" tIns="0" rIns="0" bIns="0" rtlCol="0" anchor="ctr"/>
           <a:lstStyle/>
           <a:p>
-            <a:pPr algn="l" indent="0" marL="0">
+            <a:pPr eaLnBrk="0" algn="l" indent="0" marL="0">
               <a:buNone/>
             </a:pPr>
             <a:r>
@@ -7380,7 +7380,7 @@
           <a:bodyPr wrap="square" lIns="0" tIns="0" rIns="0" bIns="0" rtlCol="0" anchor="ctr"/>
           <a:lstStyle/>
           <a:p>
-            <a:pPr algn="l" indent="0" marL="0">
+            <a:pPr eaLnBrk="0" algn="l" indent="0" marL="0">
               <a:buNone/>
             </a:pPr>
             <a:r>
@@ -7446,7 +7446,7 @@
           <a:bodyPr wrap="square" lIns="0" tIns="0" rIns="0" bIns="0" rtlCol="0" anchor="ctr"/>
           <a:lstStyle/>
           <a:p>
-            <a:pPr indent="0" marL="0">
+            <a:pPr eaLnBrk="0" indent="0" marL="0">
               <a:spcAft>
                 <a:spcPts val="600"/>
               </a:spcAft>
@@ -7496,7 +7496,7 @@
           <a:bodyPr wrap="square" lIns="0" tIns="0" rIns="0" bIns="0" rtlCol="0" anchor="ctr"/>
           <a:lstStyle/>
           <a:p>
-            <a:pPr algn="ctr" indent="0" marL="0">
+            <a:pPr eaLnBrk="0" algn="ctr" indent="0" marL="0">
               <a:buNone/>
             </a:pPr>
             <a:r>
@@ -7535,7 +7535,7 @@
           <a:bodyPr wrap="square" lIns="0" tIns="0" rIns="0" bIns="0" rtlCol="0" anchor="ctr"/>
           <a:lstStyle/>
           <a:p>
-            <a:pPr algn="l" indent="0" marL="0">
+            <a:pPr eaLnBrk="0" algn="l" indent="0" marL="0">
               <a:buNone/>
             </a:pPr>
             <a:r>
@@ -7582,7 +7582,7 @@
           <a:bodyPr wrap="square" lIns="0" tIns="0" rIns="0" bIns="0" rtlCol="0" anchor="ctr"/>
           <a:lstStyle/>
           <a:p>
-            <a:pPr algn="ctr" indent="0" marL="0">
+            <a:pPr eaLnBrk="0" algn="ctr" indent="0" marL="0">
               <a:buNone/>
             </a:pPr>
             <a:r>
@@ -7621,7 +7621,7 @@
           <a:bodyPr wrap="square" lIns="0" tIns="0" rIns="0" bIns="0" rtlCol="0" anchor="ctr"/>
           <a:lstStyle/>
           <a:p>
-            <a:pPr algn="l" indent="0" marL="0">
+            <a:pPr eaLnBrk="0" algn="l" indent="0" marL="0">
               <a:buNone/>
             </a:pPr>
             <a:r>
@@ -7668,7 +7668,7 @@
           <a:bodyPr wrap="square" lIns="0" tIns="0" rIns="0" bIns="0" rtlCol="0" anchor="ctr"/>
           <a:lstStyle/>
           <a:p>
-            <a:pPr algn="ctr" indent="0" marL="0">
+            <a:pPr eaLnBrk="0" algn="ctr" indent="0" marL="0">
               <a:buNone/>
             </a:pPr>
             <a:r>
@@ -7707,7 +7707,7 @@
           <a:bodyPr wrap="square" lIns="0" tIns="0" rIns="0" bIns="0" rtlCol="0" anchor="ctr"/>
           <a:lstStyle/>
           <a:p>
-            <a:pPr algn="l" indent="0" marL="0">
+            <a:pPr eaLnBrk="0" algn="l" indent="0" marL="0">
               <a:buNone/>
             </a:pPr>
             <a:r>
@@ -7754,7 +7754,7 @@
           <a:bodyPr wrap="square" lIns="0" tIns="0" rIns="0" bIns="0" rtlCol="0" anchor="ctr"/>
           <a:lstStyle/>
           <a:p>
-            <a:pPr algn="ctr" indent="0" marL="0">
+            <a:pPr eaLnBrk="0" algn="ctr" indent="0" marL="0">
               <a:buNone/>
             </a:pPr>
             <a:r>
@@ -7793,7 +7793,7 @@
           <a:bodyPr wrap="square" lIns="0" tIns="0" rIns="0" bIns="0" rtlCol="0" anchor="ctr"/>
           <a:lstStyle/>
           <a:p>
-            <a:pPr algn="l" indent="0" marL="0">
+            <a:pPr eaLnBrk="0" algn="l" indent="0" marL="0">
               <a:buNone/>
             </a:pPr>
             <a:r>
@@ -7850,7 +7850,7 @@
             </a:lvl1pPr>
           </a:lstStyle>
           <a:p>
-            <a:pPr algn="r"/>
+            <a:pPr eaLnBrk="0" algn="r"/>
             <a:fld id="{F7021451-1387-4CA6-816F-3879F97B5CBC}" type="slidenum">
               <a:rPr b="0" lang="en-US"/>
               <a:t>5</a:t>
@@ -7907,7 +7907,7 @@
           <a:bodyPr wrap="square" lIns="0" tIns="0" rIns="0" bIns="0" rtlCol="0" anchor="ctr"/>
           <a:lstStyle/>
           <a:p>
-            <a:pPr algn="l" indent="0" marL="0">
+            <a:pPr eaLnBrk="0" algn="l" indent="0" marL="0">
               <a:buNone/>
             </a:pPr>
             <a:r>
@@ -7946,7 +7946,7 @@
           <a:bodyPr wrap="square" lIns="0" tIns="0" rIns="0" bIns="0" rtlCol="0" anchor="ctr"/>
           <a:lstStyle/>
           <a:p>
-            <a:pPr algn="l" indent="0" marL="0">
+            <a:pPr eaLnBrk="0" algn="l" indent="0" marL="0">
               <a:buNone/>
             </a:pPr>
             <a:r>
@@ -8012,7 +8012,7 @@
           <a:bodyPr wrap="square" lIns="0" tIns="0" rIns="0" bIns="0" rtlCol="0" anchor="ctr"/>
           <a:lstStyle/>
           <a:p>
-            <a:pPr indent="0" marL="0">
+            <a:pPr eaLnBrk="0" indent="0" marL="0">
               <a:spcAft>
                 <a:spcPts val="600"/>
               </a:spcAft>
@@ -8062,7 +8062,7 @@
           <a:bodyPr wrap="square" lIns="0" tIns="0" rIns="0" bIns="0" rtlCol="0" anchor="ctr"/>
           <a:lstStyle/>
           <a:p>
-            <a:pPr algn="ctr" indent="0" marL="0">
+            <a:pPr eaLnBrk="0" algn="ctr" indent="0" marL="0">
               <a:buNone/>
             </a:pPr>
             <a:r>
@@ -8109,7 +8109,7 @@
           <a:bodyPr wrap="square" lIns="0" tIns="0" rIns="0" bIns="0" rtlCol="0" anchor="ctr"/>
           <a:lstStyle/>
           <a:p>
-            <a:pPr algn="ctr" indent="0" marL="0">
+            <a:pPr eaLnBrk="0" algn="ctr" indent="0" marL="0">
               <a:buNone/>
             </a:pPr>
             <a:r>
@@ -8156,7 +8156,7 @@
           <a:bodyPr wrap="square" lIns="0" tIns="0" rIns="0" bIns="0" rtlCol="0" anchor="ctr"/>
           <a:lstStyle/>
           <a:p>
-            <a:pPr algn="ctr" indent="0" marL="0">
+            <a:pPr eaLnBrk="0" algn="ctr" indent="0" marL="0">
               <a:buNone/>
             </a:pPr>
             <a:r>
@@ -8203,7 +8203,7 @@
           <a:bodyPr wrap="square" lIns="0" tIns="0" rIns="0" bIns="0" rtlCol="0" anchor="ctr"/>
           <a:lstStyle/>
           <a:p>
-            <a:pPr algn="ctr" indent="0" marL="0">
+            <a:pPr eaLnBrk="0" algn="ctr" indent="0" marL="0">
               <a:buNone/>
             </a:pPr>
             <a:r>
@@ -8250,7 +8250,7 @@
           <a:bodyPr wrap="square" lIns="0" tIns="0" rIns="0" bIns="0" rtlCol="0" anchor="ctr"/>
           <a:lstStyle/>
           <a:p>
-            <a:pPr algn="ctr" indent="0" marL="0">
+            <a:pPr eaLnBrk="0" algn="ctr" indent="0" marL="0">
               <a:buNone/>
             </a:pPr>
             <a:r>
@@ -8297,7 +8297,7 @@
           <a:bodyPr wrap="square" lIns="0" tIns="0" rIns="0" bIns="0" rtlCol="0" anchor="ctr"/>
           <a:lstStyle/>
           <a:p>
-            <a:pPr algn="ctr" indent="0" marL="0">
+            <a:pPr eaLnBrk="0" algn="ctr" indent="0" marL="0">
               <a:buNone/>
             </a:pPr>
             <a:r>
@@ -8344,7 +8344,7 @@
           <a:bodyPr wrap="square" lIns="0" tIns="0" rIns="0" bIns="0" rtlCol="0" anchor="ctr"/>
           <a:lstStyle/>
           <a:p>
-            <a:pPr algn="ctr" indent="0" marL="0">
+            <a:pPr eaLnBrk="0" algn="ctr" indent="0" marL="0">
               <a:buNone/>
             </a:pPr>
             <a:r>
@@ -8391,7 +8391,7 @@
           <a:bodyPr wrap="square" lIns="0" tIns="0" rIns="0" bIns="0" rtlCol="0" anchor="ctr"/>
           <a:lstStyle/>
           <a:p>
-            <a:pPr algn="ctr" indent="0" marL="0">
+            <a:pPr eaLnBrk="0" algn="ctr" indent="0" marL="0">
               <a:buNone/>
             </a:pPr>
             <a:r>
@@ -8438,7 +8438,7 @@
           <a:bodyPr wrap="square" lIns="0" tIns="0" rIns="0" bIns="0" rtlCol="0" anchor="ctr"/>
           <a:lstStyle/>
           <a:p>
-            <a:pPr algn="ctr" indent="0" marL="0">
+            <a:pPr eaLnBrk="0" algn="ctr" indent="0" marL="0">
               <a:buNone/>
             </a:pPr>
             <a:r>
@@ -8485,7 +8485,7 @@
           <a:bodyPr wrap="square" lIns="0" tIns="0" rIns="0" bIns="0" rtlCol="0" anchor="ctr"/>
           <a:lstStyle/>
           <a:p>
-            <a:pPr algn="ctr" indent="0" marL="0">
+            <a:pPr eaLnBrk="0" algn="ctr" indent="0" marL="0">
               <a:buNone/>
             </a:pPr>
             <a:r>
@@ -8532,7 +8532,7 @@
           <a:bodyPr wrap="square" lIns="0" tIns="0" rIns="0" bIns="0" rtlCol="0" anchor="ctr"/>
           <a:lstStyle/>
           <a:p>
-            <a:pPr algn="ctr" indent="0" marL="0">
+            <a:pPr eaLnBrk="0" algn="ctr" indent="0" marL="0">
               <a:buNone/>
             </a:pPr>
             <a:r>
@@ -8579,7 +8579,7 @@
           <a:bodyPr wrap="square" lIns="0" tIns="0" rIns="0" bIns="0" rtlCol="0" anchor="ctr"/>
           <a:lstStyle/>
           <a:p>
-            <a:pPr algn="ctr" indent="0" marL="0">
+            <a:pPr eaLnBrk="0" algn="ctr" indent="0" marL="0">
               <a:buNone/>
             </a:pPr>
             <a:r>
@@ -8626,7 +8626,7 @@
           <a:bodyPr wrap="square" lIns="0" tIns="0" rIns="0" bIns="0" rtlCol="0" anchor="ctr"/>
           <a:lstStyle/>
           <a:p>
-            <a:pPr algn="ctr" indent="0" marL="0">
+            <a:pPr eaLnBrk="0" algn="ctr" indent="0" marL="0">
               <a:buNone/>
             </a:pPr>
             <a:r>
@@ -8673,7 +8673,7 @@
           <a:bodyPr wrap="square" lIns="0" tIns="0" rIns="0" bIns="0" rtlCol="0" anchor="ctr"/>
           <a:lstStyle/>
           <a:p>
-            <a:pPr algn="ctr" indent="0" marL="0">
+            <a:pPr eaLnBrk="0" algn="ctr" indent="0" marL="0">
               <a:buNone/>
             </a:pPr>
             <a:r>
@@ -8720,7 +8720,7 @@
           <a:bodyPr wrap="square" lIns="0" tIns="0" rIns="0" bIns="0" rtlCol="0" anchor="ctr"/>
           <a:lstStyle/>
           <a:p>
-            <a:pPr algn="ctr" indent="0" marL="0">
+            <a:pPr eaLnBrk="0" algn="ctr" indent="0" marL="0">
               <a:buNone/>
             </a:pPr>
             <a:r>
@@ -8767,7 +8767,7 @@
           <a:bodyPr wrap="square" lIns="0" tIns="0" rIns="0" bIns="0" rtlCol="0" anchor="ctr"/>
           <a:lstStyle/>
           <a:p>
-            <a:pPr algn="ctr" indent="0" marL="0">
+            <a:pPr eaLnBrk="0" algn="ctr" indent="0" marL="0">
               <a:buNone/>
             </a:pPr>
             <a:r>
@@ -8814,7 +8814,7 @@
           <a:bodyPr wrap="square" lIns="0" tIns="0" rIns="0" bIns="0" rtlCol="0" anchor="ctr"/>
           <a:lstStyle/>
           <a:p>
-            <a:pPr algn="ctr" indent="0" marL="0">
+            <a:pPr eaLnBrk="0" algn="ctr" indent="0" marL="0">
               <a:buNone/>
             </a:pPr>
             <a:r>
@@ -8861,7 +8861,7 @@
           <a:bodyPr wrap="square" lIns="0" tIns="0" rIns="0" bIns="0" rtlCol="0" anchor="ctr"/>
           <a:lstStyle/>
           <a:p>
-            <a:pPr algn="ctr" indent="0" marL="0">
+            <a:pPr eaLnBrk="0" algn="ctr" indent="0" marL="0">
               <a:buNone/>
             </a:pPr>
             <a:r>
@@ -8908,7 +8908,7 @@
           <a:bodyPr wrap="square" lIns="0" tIns="0" rIns="0" bIns="0" rtlCol="0" anchor="ctr"/>
           <a:lstStyle/>
           <a:p>
-            <a:pPr algn="ctr" indent="0" marL="0">
+            <a:pPr eaLnBrk="0" algn="ctr" indent="0" marL="0">
               <a:buNone/>
             </a:pPr>
             <a:r>
@@ -8965,7 +8965,7 @@
             </a:lvl1pPr>
           </a:lstStyle>
           <a:p>
-            <a:pPr algn="r"/>
+            <a:pPr eaLnBrk="0" algn="r"/>
             <a:fld id="{F7021451-1387-4CA6-816F-3879F97B5CBC}" type="slidenum">
               <a:rPr b="0" lang="en-US"/>
               <a:t>6</a:t>
@@ -9022,7 +9022,7 @@
           <a:bodyPr wrap="square" lIns="0" tIns="0" rIns="0" bIns="0" rtlCol="0" anchor="ctr"/>
           <a:lstStyle/>
           <a:p>
-            <a:pPr algn="l" indent="0" marL="0">
+            <a:pPr eaLnBrk="0" algn="l" indent="0" marL="0">
               <a:buNone/>
             </a:pPr>
             <a:r>
@@ -9061,7 +9061,7 @@
           <a:bodyPr wrap="square" lIns="0" tIns="0" rIns="0" bIns="0" rtlCol="0" anchor="ctr"/>
           <a:lstStyle/>
           <a:p>
-            <a:pPr algn="l" indent="0" marL="0">
+            <a:pPr eaLnBrk="0" algn="l" indent="0" marL="0">
               <a:buNone/>
             </a:pPr>
             <a:r>
@@ -9127,7 +9127,7 @@
           <a:bodyPr wrap="square" lIns="0" tIns="0" rIns="0" bIns="0" rtlCol="0" anchor="ctr"/>
           <a:lstStyle/>
           <a:p>
-            <a:pPr indent="0" marL="0">
+            <a:pPr eaLnBrk="0" indent="0" marL="0">
               <a:spcAft>
                 <a:spcPts val="600"/>
               </a:spcAft>
@@ -9147,7 +9147,7 @@
             <a:endParaRPr lang="ko-KR" sz="3000" dirty="0"/>
           </a:p>
           <a:p>
-            <a:pPr indent="0" marL="0">
+            <a:pPr eaLnBrk="0" indent="0" marL="0">
               <a:spcAft>
                 <a:spcPts val="600"/>
               </a:spcAft>
@@ -9216,7 +9216,7 @@
           <a:bodyPr wrap="square" lIns="0" tIns="0" rIns="0" bIns="0" rtlCol="0" anchor="ctr"/>
           <a:lstStyle/>
           <a:p>
-            <a:pPr indent="0" marL="0">
+            <a:pPr eaLnBrk="0" indent="0" marL="0">
               <a:spcAft>
                 <a:spcPts val="600"/>
               </a:spcAft>
@@ -9236,7 +9236,7 @@
             <a:endParaRPr lang="ko-KR" sz="3000" dirty="0"/>
           </a:p>
           <a:p>
-            <a:pPr indent="0" marL="0">
+            <a:pPr eaLnBrk="0" indent="0" marL="0">
               <a:spcAft>
                 <a:spcPts val="600"/>
               </a:spcAft>
@@ -9256,7 +9256,7 @@
             <a:endParaRPr lang="ko-KR" sz="3000" dirty="0"/>
           </a:p>
           <a:p>
-            <a:pPr indent="0" marL="0">
+            <a:pPr eaLnBrk="0" indent="0" marL="0">
               <a:spcAft>
                 <a:spcPts val="600"/>
               </a:spcAft>
@@ -9306,7 +9306,7 @@
           <a:bodyPr wrap="square" lIns="0" tIns="0" rIns="0" bIns="0" rtlCol="0" anchor="ctr"/>
           <a:lstStyle/>
           <a:p>
-            <a:pPr algn="ctr" indent="0" marL="0">
+            <a:pPr eaLnBrk="0" algn="ctr" indent="0" marL="0">
               <a:buNone/>
             </a:pPr>
             <a:r>
@@ -9353,7 +9353,7 @@
           <a:bodyPr wrap="square" lIns="0" tIns="0" rIns="0" bIns="0" rtlCol="0" anchor="ctr"/>
           <a:lstStyle/>
           <a:p>
-            <a:pPr algn="ctr" indent="0" marL="0">
+            <a:pPr eaLnBrk="0" algn="ctr" indent="0" marL="0">
               <a:buNone/>
             </a:pPr>
             <a:r>
@@ -9400,7 +9400,7 @@
           <a:bodyPr wrap="square" lIns="0" tIns="0" rIns="0" bIns="0" rtlCol="0" anchor="ctr"/>
           <a:lstStyle/>
           <a:p>
-            <a:pPr algn="ctr" indent="0" marL="0">
+            <a:pPr eaLnBrk="0" algn="ctr" indent="0" marL="0">
               <a:buNone/>
             </a:pPr>
             <a:r>
@@ -9447,7 +9447,7 @@
           <a:bodyPr wrap="square" lIns="0" tIns="0" rIns="0" bIns="0" rtlCol="0" anchor="ctr"/>
           <a:lstStyle/>
           <a:p>
-            <a:pPr algn="ctr" indent="0" marL="0">
+            <a:pPr eaLnBrk="0" algn="ctr" indent="0" marL="0">
               <a:buNone/>
             </a:pPr>
             <a:r>
@@ -9494,7 +9494,7 @@
           <a:bodyPr wrap="square" lIns="0" tIns="0" rIns="0" bIns="0" rtlCol="0" anchor="ctr"/>
           <a:lstStyle/>
           <a:p>
-            <a:pPr algn="ctr" indent="0" marL="0">
+            <a:pPr eaLnBrk="0" algn="ctr" indent="0" marL="0">
               <a:buNone/>
             </a:pPr>
             <a:r>
@@ -9541,7 +9541,7 @@
           <a:bodyPr wrap="square" lIns="0" tIns="0" rIns="0" bIns="0" rtlCol="0" anchor="ctr"/>
           <a:lstStyle/>
           <a:p>
-            <a:pPr algn="ctr" indent="0" marL="0">
+            <a:pPr eaLnBrk="0" algn="ctr" indent="0" marL="0">
               <a:buNone/>
             </a:pPr>
             <a:r>
@@ -9588,7 +9588,7 @@
           <a:bodyPr wrap="square" lIns="0" tIns="0" rIns="0" bIns="0" rtlCol="0" anchor="ctr"/>
           <a:lstStyle/>
           <a:p>
-            <a:pPr algn="ctr" indent="0" marL="0">
+            <a:pPr eaLnBrk="0" algn="ctr" indent="0" marL="0">
               <a:buNone/>
             </a:pPr>
             <a:r>
@@ -9635,7 +9635,7 @@
           <a:bodyPr wrap="square" lIns="0" tIns="0" rIns="0" bIns="0" rtlCol="0" anchor="ctr"/>
           <a:lstStyle/>
           <a:p>
-            <a:pPr algn="ctr" indent="0" marL="0">
+            <a:pPr eaLnBrk="0" algn="ctr" indent="0" marL="0">
               <a:buNone/>
             </a:pPr>
             <a:r>
@@ -9682,7 +9682,7 @@
           <a:bodyPr wrap="square" lIns="0" tIns="0" rIns="0" bIns="0" rtlCol="0" anchor="ctr"/>
           <a:lstStyle/>
           <a:p>
-            <a:pPr algn="ctr" indent="0" marL="0">
+            <a:pPr eaLnBrk="0" algn="ctr" indent="0" marL="0">
               <a:buNone/>
             </a:pPr>
             <a:r>
@@ -9729,7 +9729,7 @@
           <a:bodyPr wrap="square" lIns="0" tIns="0" rIns="0" bIns="0" rtlCol="0" anchor="ctr"/>
           <a:lstStyle/>
           <a:p>
-            <a:pPr algn="ctr" indent="0" marL="0">
+            <a:pPr eaLnBrk="0" algn="ctr" indent="0" marL="0">
               <a:buNone/>
             </a:pPr>
             <a:r>
@@ -9776,7 +9776,7 @@
           <a:bodyPr wrap="square" lIns="0" tIns="0" rIns="0" bIns="0" rtlCol="0" anchor="ctr"/>
           <a:lstStyle/>
           <a:p>
-            <a:pPr algn="ctr" indent="0" marL="0">
+            <a:pPr eaLnBrk="0" algn="ctr" indent="0" marL="0">
               <a:buNone/>
             </a:pPr>
             <a:r>
@@ -9823,7 +9823,7 @@
           <a:bodyPr wrap="square" lIns="0" tIns="0" rIns="0" bIns="0" rtlCol="0" anchor="ctr"/>
           <a:lstStyle/>
           <a:p>
-            <a:pPr algn="ctr" indent="0" marL="0">
+            <a:pPr eaLnBrk="0" algn="ctr" indent="0" marL="0">
               <a:buNone/>
             </a:pPr>
             <a:r>
@@ -9870,7 +9870,7 @@
           <a:bodyPr wrap="square" lIns="0" tIns="0" rIns="0" bIns="0" rtlCol="0" anchor="ctr"/>
           <a:lstStyle/>
           <a:p>
-            <a:pPr algn="ctr" indent="0" marL="0">
+            <a:pPr eaLnBrk="0" algn="ctr" indent="0" marL="0">
               <a:buNone/>
             </a:pPr>
             <a:r>
@@ -9917,7 +9917,7 @@
           <a:bodyPr wrap="square" lIns="0" tIns="0" rIns="0" bIns="0" rtlCol="0" anchor="ctr"/>
           <a:lstStyle/>
           <a:p>
-            <a:pPr algn="ctr" indent="0" marL="0">
+            <a:pPr eaLnBrk="0" algn="ctr" indent="0" marL="0">
               <a:buNone/>
             </a:pPr>
             <a:r>
@@ -9964,7 +9964,7 @@
           <a:bodyPr wrap="square" lIns="0" tIns="0" rIns="0" bIns="0" rtlCol="0" anchor="ctr"/>
           <a:lstStyle/>
           <a:p>
-            <a:pPr algn="ctr" indent="0" marL="0">
+            <a:pPr eaLnBrk="0" algn="ctr" indent="0" marL="0">
               <a:buNone/>
             </a:pPr>
             <a:r>
@@ -10011,7 +10011,7 @@
           <a:bodyPr wrap="square" lIns="0" tIns="0" rIns="0" bIns="0" rtlCol="0" anchor="ctr"/>
           <a:lstStyle/>
           <a:p>
-            <a:pPr algn="ctr" indent="0" marL="0">
+            <a:pPr eaLnBrk="0" algn="ctr" indent="0" marL="0">
               <a:buNone/>
             </a:pPr>
             <a:r>
@@ -10058,7 +10058,7 @@
           <a:bodyPr wrap="square" lIns="0" tIns="0" rIns="0" bIns="0" rtlCol="0" anchor="ctr"/>
           <a:lstStyle/>
           <a:p>
-            <a:pPr algn="ctr" indent="0" marL="0">
+            <a:pPr eaLnBrk="0" algn="ctr" indent="0" marL="0">
               <a:buNone/>
             </a:pPr>
             <a:r>
@@ -10105,7 +10105,7 @@
           <a:bodyPr wrap="square" lIns="0" tIns="0" rIns="0" bIns="0" rtlCol="0" anchor="ctr"/>
           <a:lstStyle/>
           <a:p>
-            <a:pPr algn="ctr" indent="0" marL="0">
+            <a:pPr eaLnBrk="0" algn="ctr" indent="0" marL="0">
               <a:buNone/>
             </a:pPr>
             <a:r>
@@ -10152,7 +10152,7 @@
           <a:bodyPr wrap="square" lIns="0" tIns="0" rIns="0" bIns="0" rtlCol="0" anchor="ctr"/>
           <a:lstStyle/>
           <a:p>
-            <a:pPr algn="ctr" indent="0" marL="0">
+            <a:pPr eaLnBrk="0" algn="ctr" indent="0" marL="0">
               <a:buNone/>
             </a:pPr>
             <a:r>
@@ -10199,7 +10199,7 @@
           <a:bodyPr wrap="square" lIns="0" tIns="0" rIns="0" bIns="0" rtlCol="0" anchor="ctr"/>
           <a:lstStyle/>
           <a:p>
-            <a:pPr algn="ctr" indent="0" marL="0">
+            <a:pPr eaLnBrk="0" algn="ctr" indent="0" marL="0">
               <a:buNone/>
             </a:pPr>
             <a:r>
@@ -10246,7 +10246,7 @@
           <a:bodyPr wrap="square" lIns="0" tIns="0" rIns="0" bIns="0" rtlCol="0" anchor="ctr"/>
           <a:lstStyle/>
           <a:p>
-            <a:pPr algn="ctr" indent="0" marL="0">
+            <a:pPr eaLnBrk="0" algn="ctr" indent="0" marL="0">
               <a:buNone/>
             </a:pPr>
             <a:r>
@@ -10303,7 +10303,7 @@
             </a:lvl1pPr>
           </a:lstStyle>
           <a:p>
-            <a:pPr algn="r"/>
+            <a:pPr eaLnBrk="0" algn="r"/>
             <a:fld id="{F7021451-1387-4CA6-816F-3879F97B5CBC}" type="slidenum">
               <a:rPr b="0" lang="en-US"/>
               <a:t>7</a:t>
@@ -10360,7 +10360,7 @@
           <a:bodyPr wrap="square" lIns="0" tIns="0" rIns="0" bIns="0" rtlCol="0" anchor="ctr"/>
           <a:lstStyle/>
           <a:p>
-            <a:pPr algn="l" indent="0" marL="0">
+            <a:pPr eaLnBrk="0" algn="l" indent="0" marL="0">
               <a:buNone/>
             </a:pPr>
             <a:r>
@@ -10399,7 +10399,7 @@
           <a:bodyPr wrap="square" lIns="0" tIns="0" rIns="0" bIns="0" rtlCol="0" anchor="ctr"/>
           <a:lstStyle/>
           <a:p>
-            <a:pPr algn="l" indent="0" marL="0">
+            <a:pPr eaLnBrk="0" algn="l" indent="0" marL="0">
               <a:buNone/>
             </a:pPr>
             <a:r>
@@ -10446,7 +10446,7 @@
           <a:bodyPr wrap="square" lIns="0" tIns="0" rIns="0" bIns="0" rtlCol="0" anchor="ctr"/>
           <a:lstStyle/>
           <a:p>
-            <a:pPr algn="ctr" indent="0" marL="0">
+            <a:pPr eaLnBrk="0" algn="ctr" indent="0" marL="0">
               <a:buNone/>
             </a:pPr>
             <a:r>
@@ -10485,7 +10485,7 @@
           <a:bodyPr wrap="square" lIns="0" tIns="0" rIns="0" bIns="0" rtlCol="0" anchor="ctr"/>
           <a:lstStyle/>
           <a:p>
-            <a:pPr algn="l" indent="0" marL="0">
+            <a:pPr eaLnBrk="0" algn="l" indent="0" marL="0">
               <a:buNone/>
             </a:pPr>
             <a:r>
@@ -10532,7 +10532,7 @@
           <a:bodyPr wrap="square" lIns="0" tIns="0" rIns="0" bIns="0" rtlCol="0" anchor="ctr"/>
           <a:lstStyle/>
           <a:p>
-            <a:pPr algn="ctr" indent="0" marL="0">
+            <a:pPr eaLnBrk="0" algn="ctr" indent="0" marL="0">
               <a:buNone/>
             </a:pPr>
             <a:r>
@@ -10571,7 +10571,7 @@
           <a:bodyPr wrap="square" lIns="0" tIns="0" rIns="0" bIns="0" rtlCol="0" anchor="ctr"/>
           <a:lstStyle/>
           <a:p>
-            <a:pPr algn="l" indent="0" marL="0">
+            <a:pPr eaLnBrk="0" algn="l" indent="0" marL="0">
               <a:buNone/>
             </a:pPr>
             <a:r>
@@ -10618,7 +10618,7 @@
           <a:bodyPr wrap="square" lIns="0" tIns="0" rIns="0" bIns="0" rtlCol="0" anchor="ctr"/>
           <a:lstStyle/>
           <a:p>
-            <a:pPr algn="ctr" indent="0" marL="0">
+            <a:pPr eaLnBrk="0" algn="ctr" indent="0" marL="0">
               <a:buNone/>
             </a:pPr>
             <a:r>
@@ -10657,7 +10657,7 @@
           <a:bodyPr wrap="square" lIns="0" tIns="0" rIns="0" bIns="0" rtlCol="0" anchor="ctr"/>
           <a:lstStyle/>
           <a:p>
-            <a:pPr algn="l" indent="0" marL="0">
+            <a:pPr eaLnBrk="0" algn="l" indent="0" marL="0">
               <a:buNone/>
             </a:pPr>
             <a:r>
@@ -10714,7 +10714,7 @@
             </a:lvl1pPr>
           </a:lstStyle>
           <a:p>
-            <a:pPr algn="r"/>
+            <a:pPr eaLnBrk="0" algn="r"/>
             <a:fld id="{F7021451-1387-4CA6-816F-3879F97B5CBC}" type="slidenum">
               <a:rPr b="0" lang="en-US"/>
               <a:t>8</a:t>
@@ -10771,7 +10771,7 @@
           <a:bodyPr wrap="square" lIns="0" tIns="0" rIns="0" bIns="0" rtlCol="0" anchor="ctr"/>
           <a:lstStyle/>
           <a:p>
-            <a:pPr algn="l" indent="0" marL="0">
+            <a:pPr eaLnBrk="0" algn="l" indent="0" marL="0">
               <a:buNone/>
             </a:pPr>
             <a:r>
@@ -10810,7 +10810,7 @@
           <a:bodyPr wrap="square" lIns="0" tIns="0" rIns="0" bIns="0" rtlCol="0" anchor="ctr"/>
           <a:lstStyle/>
           <a:p>
-            <a:pPr algn="l" indent="0" marL="0">
+            <a:pPr eaLnBrk="0" algn="l" indent="0" marL="0">
               <a:buNone/>
             </a:pPr>
             <a:r>
@@ -10876,7 +10876,7 @@
           <a:bodyPr wrap="square" lIns="0" tIns="0" rIns="0" bIns="0" rtlCol="0" anchor="ctr"/>
           <a:lstStyle/>
           <a:p>
-            <a:pPr indent="0" marL="0">
+            <a:pPr eaLnBrk="0" indent="0" marL="0">
               <a:spcAft>
                 <a:spcPts val="600"/>
               </a:spcAft>
@@ -10929,7 +10929,7 @@
                     <a:bodyPr/>
                     <a:lstStyle/>
                     <a:p>
-                      <a:pPr algn="ctr" indent="0" marL="0">
+                      <a:pPr eaLnBrk="0" algn="ctr" indent="0" marL="0">
                         <a:buNone/>
                       </a:pPr>
                       <a:r>
@@ -10997,7 +10997,7 @@
                     <a:bodyPr/>
                     <a:lstStyle/>
                     <a:p>
-                      <a:pPr algn="ctr" indent="0" marL="0">
+                      <a:pPr eaLnBrk="0" algn="ctr" indent="0" marL="0">
                         <a:buNone/>
                       </a:pPr>
                       <a:r>
@@ -11067,7 +11067,7 @@
                     <a:bodyPr/>
                     <a:lstStyle/>
                     <a:p>
-                      <a:pPr algn="ctr" indent="0" marL="0">
+                      <a:pPr eaLnBrk="0" algn="ctr" indent="0" marL="0">
                         <a:buNone/>
                       </a:pPr>
                       <a:r>
@@ -11135,7 +11135,7 @@
                     <a:bodyPr/>
                     <a:lstStyle/>
                     <a:p>
-                      <a:pPr algn="ctr" indent="0" marL="0">
+                      <a:pPr eaLnBrk="0" algn="ctr" indent="0" marL="0">
                         <a:buNone/>
                       </a:pPr>
                       <a:r>
@@ -11205,7 +11205,7 @@
                     <a:bodyPr/>
                     <a:lstStyle/>
                     <a:p>
-                      <a:pPr algn="ctr" indent="0" marL="0">
+                      <a:pPr eaLnBrk="0" algn="ctr" indent="0" marL="0">
                         <a:buNone/>
                       </a:pPr>
                       <a:r>
@@ -11273,7 +11273,7 @@
                     <a:bodyPr/>
                     <a:lstStyle/>
                     <a:p>
-                      <a:pPr algn="ctr" indent="0" marL="0">
+                      <a:pPr eaLnBrk="0" algn="ctr" indent="0" marL="0">
                         <a:buNone/>
                       </a:pPr>
                       <a:r>
@@ -11343,7 +11343,7 @@
                     <a:bodyPr/>
                     <a:lstStyle/>
                     <a:p>
-                      <a:pPr algn="ctr" indent="0" marL="0">
+                      <a:pPr eaLnBrk="0" algn="ctr" indent="0" marL="0">
                         <a:buNone/>
                       </a:pPr>
                       <a:r>
@@ -11411,7 +11411,7 @@
                     <a:bodyPr/>
                     <a:lstStyle/>
                     <a:p>
-                      <a:pPr algn="ctr" indent="0" marL="0">
+                      <a:pPr eaLnBrk="0" algn="ctr" indent="0" marL="0">
                         <a:buNone/>
                       </a:pPr>
                       <a:r>
@@ -11481,7 +11481,7 @@
                     <a:bodyPr/>
                     <a:lstStyle/>
                     <a:p>
-                      <a:pPr algn="ctr" indent="0" marL="0">
+                      <a:pPr eaLnBrk="0" algn="ctr" indent="0" marL="0">
                         <a:buNone/>
                       </a:pPr>
                       <a:r>
@@ -11549,7 +11549,7 @@
                     <a:bodyPr/>
                     <a:lstStyle/>
                     <a:p>
-                      <a:pPr algn="ctr" indent="0" marL="0">
+                      <a:pPr eaLnBrk="0" algn="ctr" indent="0" marL="0">
                         <a:buNone/>
                       </a:pPr>
                       <a:r>
@@ -11656,7 +11656,7 @@
             </a:lvl1pPr>
           </a:lstStyle>
           <a:p>
-            <a:pPr algn="r"/>
+            <a:pPr eaLnBrk="0" algn="r"/>
             <a:fld id="{F7021451-1387-4CA6-816F-3879F97B5CBC}" type="slidenum">
               <a:rPr b="0" lang="en-US"/>
               <a:t>9</a:t>

--- a/dist/초3/국어/읽기와어휘/초3_국어_읽기와어휘_03_국어사전찾기.pptx
+++ b/dist/초3/국어/읽기와어휘/초3_국어_읽기와어휘_03_국어사전찾기.pptx
@@ -119,13 +119,13 @@
   <p:extLst>
     <p:ext uri="{521415D9-36F7-43E2-AB2F-B90AF26B5E84}">
       <p14:sectionLst xmlns:p14="http://schemas.microsoft.com/office/powerpoint/2010/main">
-        <p14:section name="도입" id="{7bfbba80-5fa9-c435-7642-05f6bbbee6df}">
+        <p14:section name="도입" id="{5917d470-6287-0a67-13d5-62d66782d0ed}">
           <p14:sldIdLst>
             <p14:sldId id="256"/>
             <p14:sldId id="257"/>
           </p14:sldIdLst>
         </p14:section>
-        <p14:section name="개념" id="{6dc669c4-1e95-7ddd-2444-d52c62ea6c17}">
+        <p14:section name="개념" id="{a54e007b-6481-290e-80c8-b8c06a5a4916}">
           <p14:sldIdLst>
             <p14:sldId id="258"/>
             <p14:sldId id="259"/>
@@ -133,31 +133,31 @@
             <p14:sldId id="262"/>
           </p14:sldIdLst>
         </p14:section>
-        <p14:section name="연습" id="{ec7f4a87-ab86-d9da-b7ad-affa7fb539a5}">
+        <p14:section name="연습" id="{65be6339-6fe4-3a8a-5a05-401cc7124b30}">
           <p14:sldIdLst>
             <p14:sldId id="260"/>
             <p14:sldId id="263"/>
           </p14:sldIdLst>
         </p14:section>
-        <p14:section name="개념" id="{d711e9d7-8562-f46f-baf3-0fcdf5d68bbb}">
+        <p14:section name="개념" id="{e745860f-cf68-8535-c520-93b212bdbf89}">
           <p14:sldIdLst/>
         </p14:section>
-        <p14:section name="연습" id="{75be6427-6a92-7769-68d9-3b84004b50f1}">
+        <p14:section name="연습" id="{473a40ec-de2e-583a-65d0-29b852dea9ff}">
           <p14:sldIdLst/>
         </p14:section>
-        <p14:section name="확인" id="{ec0a3cc7-230a-d40b-3339-6aecf453e0cc}">
+        <p14:section name="확인" id="{3b01d9c5-9b19-b646-7996-e8bda472bd5c}">
           <p14:sldIdLst>
             <p14:sldId id="264"/>
             <p14:sldId id="265"/>
             <p14:sldId id="266"/>
           </p14:sldIdLst>
         </p14:section>
-        <p14:section name="정리" id="{9054628c-7f17-8253-e819-866086c830d8}">
+        <p14:section name="정리" id="{099b9acd-c73a-790f-bf52-3df3bf2697b0}">
           <p14:sldIdLst>
             <p14:sldId id="267"/>
           </p14:sldIdLst>
         </p14:section>
-        <p14:section name="보충" id="{86647e8a-e6c3-7de5-67ac-7fec5ad8e30c}">
+        <p14:section name="보충" id="{1a7a8d1f-5826-b3ef-aeb8-3391b469e846}">
           <p14:sldIdLst>
             <p14:sldId id="268"/>
           </p14:sldIdLst>
@@ -3102,12 +3102,12 @@
         </p:nvSpPr>
         <p:spPr>
           <a:xfrm>
-            <a:off x="548640" y="5349240"/>
-            <a:ext cx="11091672" cy="868680"/>
+            <a:off x="548640" y="4959096"/>
+            <a:ext cx="11091672" cy="1258824"/>
           </a:xfrm>
           <a:prstGeom prst="roundRect">
             <a:avLst>
-              <a:gd name="adj" fmla="val 12632"/>
+              <a:gd name="adj" fmla="val 8717"/>
             </a:avLst>
           </a:prstGeom>
           <a:solidFill>
@@ -3129,8 +3129,8 @@
         </p:nvSpPr>
         <p:spPr>
           <a:xfrm>
-            <a:off x="822960" y="5486400"/>
-            <a:ext cx="10543032" cy="594360"/>
+            <a:off x="822960" y="5096256"/>
+            <a:ext cx="10543032" cy="984504"/>
           </a:xfrm>
           <a:prstGeom prst="rect">
             <a:avLst/>
@@ -10912,7 +10912,7 @@
           </p:nvPr>
         </p:nvGraphicFramePr>
         <p:xfrm>
-          <a:off x="1293876" y="2346960"/>
+          <a:off x="1293876" y="2385060"/>
           <a:ext cx="9601200" cy="914400"/>
         </p:xfrm>
         <a:graphic>
@@ -10923,7 +10923,7 @@
                 <a:gridCol w="2880360"/>
                 <a:gridCol w="6720840"/>
               </a:tblGrid>
-              <a:tr h="487680">
+              <a:tr h="472440">
                 <a:tc>
                   <a:txBody>
                     <a:bodyPr/>
@@ -11061,7 +11061,7 @@
                   </a:tcPr>
                 </a:tc>
               </a:tr>
-              <a:tr h="487680">
+              <a:tr h="472440">
                 <a:tc>
                   <a:txBody>
                     <a:bodyPr/>
@@ -11199,7 +11199,7 @@
                   </a:tcPr>
                 </a:tc>
               </a:tr>
-              <a:tr h="487680">
+              <a:tr h="472440">
                 <a:tc>
                   <a:txBody>
                     <a:bodyPr/>
@@ -11337,7 +11337,7 @@
                   </a:tcPr>
                 </a:tc>
               </a:tr>
-              <a:tr h="487680">
+              <a:tr h="472440">
                 <a:tc>
                   <a:txBody>
                     <a:bodyPr/>
@@ -11475,7 +11475,7 @@
                   </a:tcPr>
                 </a:tc>
               </a:tr>
-              <a:tr h="487680">
+              <a:tr h="472440">
                 <a:tc>
                   <a:txBody>
                     <a:bodyPr/>
